--- a/dist/초3/과학/힘과소리/초3_과학_힘과소리_01_밀기·당기기와수평잡기.pptx
+++ b/dist/초3/과학/힘과소리/초3_과학_힘과소리_01_밀기·당기기와수평잡기.pptx
@@ -123,13 +123,13 @@
   <p:extLst>
     <p:ext uri="{521415D9-36F7-43E2-AB2F-B90AF26B5E84}">
       <p14:sectionLst xmlns:p14="http://schemas.microsoft.com/office/powerpoint/2010/main">
-        <p14:section name="도입" id="{be85357a-3efa-ac43-5192-45e7c85827a6}">
+        <p14:section name="도입" id="{c35acea3-1257-029c-9c54-660a2a3cd7c4}">
           <p14:sldIdLst>
             <p14:sldId id="256"/>
             <p14:sldId id="257"/>
           </p14:sldIdLst>
         </p14:section>
-        <p14:section name="개념" id="{4fb72c39-f10f-a4a0-243f-8161dddb85ca}">
+        <p14:section name="개념" id="{4543e4a4-0386-d5e5-1c3d-3a1575f23dfe}">
           <p14:sldIdLst>
             <p14:sldId id="258"/>
             <p14:sldId id="259"/>
@@ -139,7 +139,7 @@
             <p14:sldId id="264"/>
           </p14:sldIdLst>
         </p14:section>
-        <p14:section name="연습" id="{5b6e95d6-ac81-dfaf-0d9c-9f58d159163f}">
+        <p14:section name="연습" id="{717aa92b-dd0e-6200-10c4-24cac06cf7dc}">
           <p14:sldIdLst>
             <p14:sldId id="262"/>
             <p14:sldId id="265"/>
@@ -147,25 +147,25 @@
             <p14:sldId id="267"/>
           </p14:sldIdLst>
         </p14:section>
-        <p14:section name="개념" id="{dfed36dd-e5fc-2d9e-1941-07067fc94533}">
+        <p14:section name="개념" id="{2176a75b-c22c-6319-aed9-9eb40c602ae3}">
           <p14:sldIdLst/>
         </p14:section>
-        <p14:section name="연습" id="{c6f4b625-6e14-c31e-a5b3-32cdb3f8b5ad}">
+        <p14:section name="연습" id="{4e08771e-780d-c4d0-fce4-42d0b08600c8}">
           <p14:sldIdLst/>
         </p14:section>
-        <p14:section name="확인" id="{05321d05-f22e-34de-654f-433abc0576c9}">
+        <p14:section name="확인" id="{ba65d923-06d4-f3b6-3ac9-30be4d3645d5}">
           <p14:sldIdLst>
             <p14:sldId id="268"/>
             <p14:sldId id="269"/>
             <p14:sldId id="270"/>
           </p14:sldIdLst>
         </p14:section>
-        <p14:section name="정리" id="{4ea79093-4219-9d14-1aaf-094e3cb3ea83}">
+        <p14:section name="정리" id="{6f9f108c-2c7a-3aed-b6f2-9bee0394d416}">
           <p14:sldIdLst>
             <p14:sldId id="271"/>
           </p14:sldIdLst>
         </p14:section>
-        <p14:section name="보충" id="{29b2942e-325f-f1c6-e3cc-63b62dc3a6ae}">
+        <p14:section name="보충" id="{74092dc6-ae81-c488-0671-b805a4cac949}">
           <p14:sldIdLst>
             <p14:sldId id="272"/>
           </p14:sldIdLst>
@@ -582,6 +582,8 @@
 - “오늘은 과학자처럼 먼저 예상하고, 실험해 보고, 본 것을 기록해서 답을 찾을 거야. 그리고 자로 시소를 만들어서 수평을 잡아 볼 거야.”
 예상 답
 - “문이 열려요.” “움직여요.”
+막히면
+- 아이가 질문을 어려워하면 고무줄을 손에 쥐여 주고 “이걸로 밀거나 당겨 볼 수 있을까?”라고 묻습니다.
 주의
 - 오늘은 이 차시의 첫 과학 수업입니다. 결과를 미리 알려 주지 말고, 아이의 예상을 그대로 들어 둡니다.
 - 준비물(자, 육각 연필, 100원짜리 동전 3개, 지우개, 딱풀, 고무줄, 스펀지, 작은 공)을 상 위에 미리 놓아 둡니다.</a:t>

--- a/dist/초3/과학/힘과소리/초3_과학_힘과소리_01_밀기·당기기와수평잡기.pptx
+++ b/dist/초3/과학/힘과소리/초3_과학_힘과소리_01_밀기·당기기와수평잡기.pptx
@@ -123,13 +123,13 @@
   <p:extLst>
     <p:ext uri="{521415D9-36F7-43E2-AB2F-B90AF26B5E84}">
       <p14:sectionLst xmlns:p14="http://schemas.microsoft.com/office/powerpoint/2010/main">
-        <p14:section name="도입" id="{c35acea3-1257-029c-9c54-660a2a3cd7c4}">
+        <p14:section name="도입" id="{3aaf656b-ead9-2a21-9425-cc75ab6ebc72}">
           <p14:sldIdLst>
             <p14:sldId id="256"/>
             <p14:sldId id="257"/>
           </p14:sldIdLst>
         </p14:section>
-        <p14:section name="개념" id="{4543e4a4-0386-d5e5-1c3d-3a1575f23dfe}">
+        <p14:section name="개념" id="{6dd0b02f-ef10-ea5d-907e-4b8f8717bcce}">
           <p14:sldIdLst>
             <p14:sldId id="258"/>
             <p14:sldId id="259"/>
@@ -139,7 +139,7 @@
             <p14:sldId id="264"/>
           </p14:sldIdLst>
         </p14:section>
-        <p14:section name="연습" id="{717aa92b-dd0e-6200-10c4-24cac06cf7dc}">
+        <p14:section name="연습" id="{b5395d95-635c-6c45-1cdf-d65a04c1b1c5}">
           <p14:sldIdLst>
             <p14:sldId id="262"/>
             <p14:sldId id="265"/>
@@ -147,25 +147,25 @@
             <p14:sldId id="267"/>
           </p14:sldIdLst>
         </p14:section>
-        <p14:section name="개념" id="{2176a75b-c22c-6319-aed9-9eb40c602ae3}">
+        <p14:section name="개념" id="{6bdf4996-4bec-3d83-af86-c2cd9483b67e}">
           <p14:sldIdLst/>
         </p14:section>
-        <p14:section name="연습" id="{4e08771e-780d-c4d0-fce4-42d0b08600c8}">
+        <p14:section name="연습" id="{53f4cc3d-740d-72bc-87ed-bd1a0d188bfe}">
           <p14:sldIdLst/>
         </p14:section>
-        <p14:section name="확인" id="{ba65d923-06d4-f3b6-3ac9-30be4d3645d5}">
+        <p14:section name="확인" id="{44e678e4-2b8b-ba61-41c8-d7992bce3324}">
           <p14:sldIdLst>
             <p14:sldId id="268"/>
             <p14:sldId id="269"/>
             <p14:sldId id="270"/>
           </p14:sldIdLst>
         </p14:section>
-        <p14:section name="정리" id="{6f9f108c-2c7a-3aed-b6f2-9bee0394d416}">
+        <p14:section name="정리" id="{e5decd36-b3f3-489d-18b6-96e513a11f69}">
           <p14:sldIdLst>
             <p14:sldId id="271"/>
           </p14:sldIdLst>
         </p14:section>
-        <p14:section name="보충" id="{74092dc6-ae81-c488-0671-b805a4cac949}">
+        <p14:section name="보충" id="{43cda7f5-f04c-54ab-31e2-4ba44e612d49}">
           <p14:sldIdLst>
             <p14:sldId id="272"/>
           </p14:sldIdLst>
